--- a/W00_The_biology_and_numbers_bridge.pptx
+++ b/W00_The_biology_and_numbers_bridge.pptx
@@ -25,6 +25,7 @@
     <p:sldId id="273" r:id="rId19"/>
     <p:sldId id="274" r:id="rId20"/>
     <p:sldId id="275" r:id="rId21"/>
+    <p:sldId id="276" r:id="rId27"/>
   </p:sldIdLst>
   <p:notesMasterIdLst>
     <p:notesMasterId r:id="rId22"/>
@@ -10309,6 +10310,10 @@
             <a:prstDash val="solid"/>
           </a:ln>
         </p:spPr>
+        <p:txBody>
+          <a:bodyPr/>
+          <a:p/>
+        </p:txBody>
       </p:sp>
       <p:sp>
         <p:nvSpPr>
@@ -10455,6 +10460,10 @@
             <a:prstDash val="solid"/>
           </a:ln>
         </p:spPr>
+        <p:txBody>
+          <a:bodyPr/>
+          <a:p/>
+        </p:txBody>
       </p:sp>
       <p:sp>
         <p:nvSpPr>
@@ -10599,6 +10608,458 @@
               <a:t>S10  DESeq2: Analyzing RNA-seq data with DESeq2, release vignette.</a:t>
             </a:r>
             <a:endParaRPr lang="en-US" sz="1997" dirty="0"/>
+          </a:p>
+        </p:txBody>
+      </p:sp>
+    </p:spTree>
+  </p:cSld>
+  <p:clrMapOvr>
+    <a:masterClrMapping/>
+  </p:clrMapOvr>
+</p:sld>
+</file>
+
+<file path=ppt/slides/slide21.xml><?xml version="1.0" encoding="utf-8"?>
+<p:sld xmlns:a="http://schemas.openxmlformats.org/drawingml/2006/main" xmlns:p="http://schemas.openxmlformats.org/presentationml/2006/main" xmlns:r="http://schemas.openxmlformats.org/officeDocument/2006/relationships">
+  <p:cSld>
+    <p:spTree>
+      <p:nvGrpSpPr>
+        <p:cNvPr id="1" name=""/>
+        <p:cNvGrpSpPr/>
+        <p:nvPr/>
+      </p:nvGrpSpPr>
+      <p:grpSpPr/>
+      <p:sp>
+        <p:nvSpPr>
+          <p:cNvPr id="2" name="Rectangle 1"/>
+          <p:cNvSpPr/>
+          <p:nvPr/>
+        </p:nvSpPr>
+        <p:spPr>
+          <a:xfrm>
+            <a:off x="0" y="0"/>
+            <a:ext cx="12188952" cy="82296"/>
+          </a:xfrm>
+          <a:prstGeom prst="rect">
+            <a:avLst/>
+          </a:prstGeom>
+          <a:solidFill>
+            <a:srgbClr val="2A78D6"/>
+          </a:solidFill>
+          <a:ln>
+            <a:noFill/>
+          </a:ln>
+          <a:effectLst/>
+        </p:spPr>
+        <p:style>
+          <a:lnRef idx="1">
+            <a:schemeClr val="accent1"/>
+          </a:lnRef>
+          <a:fillRef idx="3">
+            <a:schemeClr val="accent1"/>
+          </a:fillRef>
+          <a:effectRef idx="2">
+            <a:schemeClr val="accent1"/>
+          </a:effectRef>
+          <a:fontRef idx="minor">
+            <a:schemeClr val="lt1"/>
+          </a:fontRef>
+        </p:style>
+        <p:txBody>
+          <a:bodyPr rtlCol="0" anchor="ctr"/>
+          <a:lstStyle/>
+          <a:p>
+            <a:pPr algn="ctr"/>
+          </a:p>
+        </p:txBody>
+      </p:sp>
+      <p:sp>
+        <p:nvSpPr>
+          <p:cNvPr id="3" name="TextBox 2"/>
+          <p:cNvSpPr txBox="1"/>
+          <p:nvPr/>
+        </p:nvSpPr>
+        <p:spPr>
+          <a:xfrm>
+            <a:off x="502920" y="246888"/>
+            <a:ext cx="3657600" cy="292608"/>
+          </a:xfrm>
+          <a:prstGeom prst="rect">
+            <a:avLst/>
+          </a:prstGeom>
+          <a:noFill/>
+        </p:spPr>
+        <p:txBody>
+          <a:bodyPr wrap="square" lIns="0" rIns="0" tIns="0" bIns="0">
+            <a:spAutoFit/>
+          </a:bodyPr>
+          <a:lstStyle/>
+          <a:p>
+            <a:r>
+              <a:rPr sz="1000" b="1">
+                <a:solidFill>
+                  <a:srgbClr val="526171"/>
+                </a:solidFill>
+                <a:latin typeface="Aptos"/>
+              </a:rPr>
+              <a:t>BIB / BRIDGE</a:t>
+            </a:r>
+          </a:p>
+        </p:txBody>
+      </p:sp>
+      <p:sp>
+        <p:nvSpPr>
+          <p:cNvPr id="4" name="TextBox 3"/>
+          <p:cNvSpPr txBox="1"/>
+          <p:nvPr/>
+        </p:nvSpPr>
+        <p:spPr>
+          <a:xfrm>
+            <a:off x="9281160" y="246888"/>
+            <a:ext cx="2377440" cy="292608"/>
+          </a:xfrm>
+          <a:prstGeom prst="rect">
+            <a:avLst/>
+          </a:prstGeom>
+          <a:noFill/>
+        </p:spPr>
+        <p:txBody>
+          <a:bodyPr wrap="square" lIns="0" rIns="0" tIns="0" bIns="0">
+            <a:spAutoFit/>
+          </a:bodyPr>
+          <a:lstStyle/>
+          <a:p>
+            <a:pPr algn="r"/>
+            <a:r>
+              <a:rPr sz="1000" b="1">
+                <a:solidFill>
+                  <a:srgbClr val="2A78D6"/>
+                </a:solidFill>
+                <a:latin typeface="Aptos"/>
+              </a:rPr>
+              <a:t>ENTRY DIAGNOSTIC</a:t>
+            </a:r>
+          </a:p>
+        </p:txBody>
+      </p:sp>
+      <p:sp>
+        <p:nvSpPr>
+          <p:cNvPr id="5" name="TextBox 4"/>
+          <p:cNvSpPr txBox="1"/>
+          <p:nvPr/>
+        </p:nvSpPr>
+        <p:spPr>
+          <a:xfrm>
+            <a:off x="502920" y="786384"/>
+            <a:ext cx="11137392" cy="914400"/>
+          </a:xfrm>
+          <a:prstGeom prst="rect">
+            <a:avLst/>
+          </a:prstGeom>
+          <a:noFill/>
+        </p:spPr>
+        <p:txBody>
+          <a:bodyPr wrap="square" lIns="0" rIns="0" tIns="0" bIns="0" anchor="ctr">
+            <a:spAutoFit/>
+          </a:bodyPr>
+          <a:lstStyle/>
+          <a:p>
+            <a:r>
+              <a:rPr sz="3200" b="1">
+                <a:solidFill>
+                  <a:srgbClr val="232D3B"/>
+                </a:solidFill>
+                <a:latin typeface="Aptos"/>
+              </a:rPr>
+              <a:t>Before you leave: the Entry Diagnostic</a:t>
+            </a:r>
+          </a:p>
+        </p:txBody>
+      </p:sp>
+      <p:sp>
+        <p:nvSpPr>
+          <p:cNvPr id="6" name="Rectangle 5"/>
+          <p:cNvSpPr/>
+          <p:nvPr/>
+        </p:nvSpPr>
+        <p:spPr>
+          <a:xfrm>
+            <a:off x="502920" y="6355080"/>
+            <a:ext cx="11183112" cy="9144"/>
+          </a:xfrm>
+          <a:prstGeom prst="rect">
+            <a:avLst/>
+          </a:prstGeom>
+          <a:solidFill>
+            <a:srgbClr val="D8DEE6"/>
+          </a:solidFill>
+          <a:ln>
+            <a:noFill/>
+          </a:ln>
+          <a:effectLst/>
+        </p:spPr>
+        <p:style>
+          <a:lnRef idx="1">
+            <a:schemeClr val="accent1"/>
+          </a:lnRef>
+          <a:fillRef idx="3">
+            <a:schemeClr val="accent1"/>
+          </a:fillRef>
+          <a:effectRef idx="2">
+            <a:schemeClr val="accent1"/>
+          </a:effectRef>
+          <a:fontRef idx="minor">
+            <a:schemeClr val="lt1"/>
+          </a:fontRef>
+        </p:style>
+        <p:txBody>
+          <a:bodyPr rtlCol="0" anchor="ctr"/>
+          <a:lstStyle/>
+          <a:p>
+            <a:pPr algn="ctr"/>
+          </a:p>
+        </p:txBody>
+      </p:sp>
+      <p:sp>
+        <p:nvSpPr>
+          <p:cNvPr id="7" name="TextBox 6"/>
+          <p:cNvSpPr txBox="1"/>
+          <p:nvPr/>
+        </p:nvSpPr>
+        <p:spPr>
+          <a:xfrm>
+            <a:off x="502920" y="6473952"/>
+            <a:ext cx="5486400" cy="182880"/>
+          </a:xfrm>
+          <a:prstGeom prst="rect">
+            <a:avLst/>
+          </a:prstGeom>
+          <a:noFill/>
+        </p:spPr>
+        <p:txBody>
+          <a:bodyPr wrap="square" lIns="0" rIns="0" tIns="0" bIns="0">
+            <a:spAutoFit/>
+          </a:bodyPr>
+          <a:lstStyle/>
+          <a:p>
+            <a:r>
+              <a:rPr sz="800" b="0">
+                <a:solidFill>
+                  <a:srgbClr val="526171"/>
+                </a:solidFill>
+                <a:latin typeface="Aptos"/>
+              </a:rPr>
+              <a:t>BIOINFORMATICS FOR BIOENGINEERING</a:t>
+            </a:r>
+          </a:p>
+        </p:txBody>
+      </p:sp>
+      <p:sp>
+        <p:nvSpPr>
+          <p:cNvPr id="8" name="TextBox 7"/>
+          <p:cNvSpPr txBox="1"/>
+          <p:nvPr/>
+        </p:nvSpPr>
+        <p:spPr>
+          <a:xfrm>
+            <a:off x="7406640" y="6464808"/>
+            <a:ext cx="4251960" cy="210312"/>
+          </a:xfrm>
+          <a:prstGeom prst="rect">
+            <a:avLst/>
+          </a:prstGeom>
+          <a:noFill/>
+        </p:spPr>
+        <p:txBody>
+          <a:bodyPr wrap="square" lIns="0" rIns="0" tIns="0" bIns="0">
+            <a:spAutoFit/>
+          </a:bodyPr>
+          <a:lstStyle/>
+          <a:p>
+            <a:pPr algn="r"/>
+            <a:r>
+              <a:rPr sz="800" b="0">
+                <a:solidFill>
+                  <a:srgbClr val="526171"/>
+                </a:solidFill>
+                <a:latin typeface="Aptos"/>
+              </a:rPr>
+              <a:t>21</a:t>
+            </a:r>
+          </a:p>
+        </p:txBody>
+      </p:sp>
+      <p:pic>
+        <p:nvPicPr>
+          <p:cNvPr id="9" name="Picture 8" descr="qr_bare.png"/>
+          <p:cNvPicPr>
+            <a:picLocks noChangeAspect="1"/>
+          </p:cNvPicPr>
+          <p:nvPr/>
+        </p:nvPicPr>
+        <p:blipFill>
+          <a:blip r:embed="rId2"/>
+          <a:stretch>
+            <a:fillRect/>
+          </a:stretch>
+        </p:blipFill>
+        <p:spPr>
+          <a:xfrm>
+            <a:off x="960120" y="1965960"/>
+            <a:ext cx="3246120" cy="3246120"/>
+          </a:xfrm>
+          <a:prstGeom prst="rect">
+            <a:avLst/>
+          </a:prstGeom>
+        </p:spPr>
+      </p:pic>
+      <p:sp>
+        <p:nvSpPr>
+          <p:cNvPr id="10" name="TextBox 9"/>
+          <p:cNvSpPr txBox="1"/>
+          <p:nvPr/>
+        </p:nvSpPr>
+        <p:spPr>
+          <a:xfrm>
+            <a:off x="502920" y="5321808"/>
+            <a:ext cx="4160520" cy="292608"/>
+          </a:xfrm>
+          <a:prstGeom prst="rect">
+            <a:avLst/>
+          </a:prstGeom>
+          <a:noFill/>
+        </p:spPr>
+        <p:txBody>
+          <a:bodyPr wrap="square" lIns="0" rIns="0" tIns="0" bIns="0">
+            <a:spAutoFit/>
+          </a:bodyPr>
+          <a:lstStyle/>
+          <a:p>
+            <a:pPr algn="ctr"/>
+            <a:r>
+              <a:rPr sz="1400" b="1">
+                <a:solidFill>
+                  <a:srgbClr val="232D3B"/>
+                </a:solidFill>
+                <a:latin typeface="Aptos"/>
+              </a:rPr>
+              <a:t>https://forms.gle/8d7q8LGjdiRKuv3j8</a:t>
+            </a:r>
+          </a:p>
+        </p:txBody>
+      </p:sp>
+      <p:sp>
+        <p:nvSpPr>
+          <p:cNvPr id="11" name="TextBox 10"/>
+          <p:cNvSpPr txBox="1"/>
+          <p:nvPr/>
+        </p:nvSpPr>
+        <p:spPr>
+          <a:xfrm>
+            <a:off x="4846320" y="1965960"/>
+            <a:ext cx="6812280" cy="3566160"/>
+          </a:xfrm>
+          <a:prstGeom prst="rect">
+            <a:avLst/>
+          </a:prstGeom>
+          <a:noFill/>
+        </p:spPr>
+        <p:txBody>
+          <a:bodyPr wrap="square" lIns="0" rIns="0" tIns="0" bIns="0">
+            <a:spAutoFit/>
+          </a:bodyPr>
+          <a:lstStyle/>
+          <a:p>
+            <a:r>
+              <a:rPr sz="1600" b="0">
+                <a:solidFill>
+                  <a:srgbClr val="232D3B"/>
+                </a:solidFill>
+                <a:latin typeface="Aptos"/>
+              </a:rPr>
+              <a:t>Ungraded. It cannot affect your grade.</a:t>
+            </a:r>
+          </a:p>
+          <a:p>
+            <a:r>
+              <a:rPr sz="1600" b="0">
+                <a:solidFill>
+                  <a:srgbClr val="232D3B"/>
+                </a:solidFill>
+                <a:latin typeface="Aptos"/>
+              </a:rPr>
+              <a:t>About 15 minutes. No AI, no search, no notes.</a:t>
+            </a:r>
+          </a:p>
+          <a:p/>
+          <a:p>
+            <a:r>
+              <a:rPr sz="1600" b="0">
+                <a:solidFill>
+                  <a:srgbClr val="232D3B"/>
+                </a:solidFill>
+                <a:latin typeface="Aptos"/>
+              </a:rPr>
+              <a:t>Twelve questions, so I know which parts of this bridge to spend time on.</a:t>
+            </a:r>
+          </a:p>
+          <a:p/>
+          <a:p>
+            <a:r>
+              <a:rPr sz="1600" b="0">
+                <a:solidFill>
+                  <a:srgbClr val="232D3B"/>
+                </a:solidFill>
+                <a:latin typeface="Aptos"/>
+              </a:rPr>
+              <a:t>Choose “Not sure” rather than guessing. A confident wrong answer and an honest “not sure” need different help from me.</a:t>
+            </a:r>
+          </a:p>
+          <a:p/>
+          <a:p>
+            <a:r>
+              <a:rPr sz="1600" b="0">
+                <a:solidFill>
+                  <a:srgbClr val="232D3B"/>
+                </a:solidFill>
+                <a:latin typeface="Aptos"/>
+              </a:rPr>
+              <a:t>You get the answers and an explanation the moment you submit.</a:t>
+            </a:r>
+          </a:p>
+        </p:txBody>
+      </p:sp>
+      <p:sp>
+        <p:nvSpPr>
+          <p:cNvPr id="12" name="TextBox 11"/>
+          <p:cNvSpPr txBox="1"/>
+          <p:nvPr/>
+        </p:nvSpPr>
+        <p:spPr>
+          <a:xfrm>
+            <a:off x="4846320" y="5687568"/>
+            <a:ext cx="6812280" cy="502920"/>
+          </a:xfrm>
+          <a:prstGeom prst="rect">
+            <a:avLst/>
+          </a:prstGeom>
+          <a:noFill/>
+        </p:spPr>
+        <p:txBody>
+          <a:bodyPr wrap="square" lIns="0" rIns="0" tIns="0" bIns="0">
+            <a:spAutoFit/>
+          </a:bodyPr>
+          <a:lstStyle/>
+          <a:p>
+            <a:r>
+              <a:rPr sz="1300" b="0">
+                <a:solidFill>
+                  <a:srgbClr val="526171"/>
+                </a:solidFill>
+                <a:latin typeface="Aptos"/>
+              </a:rPr>
+              <a:t>Notlandırılmaz · Yaklaşık 15 dakika · Emin değilseniz tahmin etmek yerine “Emin değilim” seçin.</a:t>
+            </a:r>
           </a:p>
         </p:txBody>
       </p:sp>
